--- a/api_plumber_slides.pptx
+++ b/api_plumber_slides.pptx
@@ -231,7 +231,7 @@
           <a:p>
             <a:fld id="{6361535E-F864-4BF1-B6FD-CF4BB8FE907D}" type="datetimeFigureOut">
               <a:rPr lang="en-GB" smtClean="0"/>
-              <a:t>10/02/2025</a:t>
+              <a:t>09/02/2026</a:t>
             </a:fld>
             <a:endParaRPr lang="en-GB"/>
           </a:p>
@@ -4937,7 +4937,7 @@
                 <a:ea typeface="Calibri"/>
                 <a:cs typeface="Calibri"/>
               </a:rPr>
-              <a:t>Query vs Path based API</a:t>
+              <a:t>Query vs Path based request</a:t>
             </a:r>
           </a:p>
         </p:txBody>
@@ -5208,12 +5208,12 @@
           <a:lstStyle/>
           <a:p>
             <a:r>
-              <a:rPr lang="en-GB">
+              <a:rPr lang="en-GB" dirty="0">
                 <a:cs typeface="Calibri"/>
               </a:rPr>
               <a:t>Response</a:t>
             </a:r>
-            <a:endParaRPr lang="en-GB"/>
+            <a:endParaRPr lang="en-GB" dirty="0"/>
           </a:p>
         </p:txBody>
       </p:sp>
@@ -5245,12 +5245,12 @@
               <a:buChar char="•"/>
             </a:pPr>
             <a:r>
-              <a:rPr lang="en-GB">
+              <a:rPr lang="en-GB" dirty="0">
                 <a:cs typeface="Calibri" panose="020F0502020204030204"/>
               </a:rPr>
               <a:t>Typically get a header and content in the response</a:t>
             </a:r>
-            <a:endParaRPr lang="en-US"/>
+            <a:endParaRPr lang="en-US" dirty="0"/>
           </a:p>
           <a:p>
             <a:pPr>
@@ -5258,7 +5258,7 @@
               <a:buChar char="•"/>
             </a:pPr>
             <a:r>
-              <a:rPr lang="en-GB">
+              <a:rPr lang="en-GB" dirty="0">
                 <a:cs typeface="Calibri" panose="020F0502020204030204"/>
               </a:rPr>
               <a:t>Response codes in header</a:t>
@@ -5270,7 +5270,7 @@
               <a:buChar char="•"/>
             </a:pPr>
             <a:r>
-              <a:rPr lang="en-GB">
+              <a:rPr lang="en-GB" dirty="0">
                 <a:cs typeface="Calibri" panose="020F0502020204030204"/>
               </a:rPr>
               <a:t>200 – OK</a:t>
@@ -5282,7 +5282,7 @@
               <a:buChar char="•"/>
             </a:pPr>
             <a:r>
-              <a:rPr lang="en-GB">
+              <a:rPr lang="en-GB" dirty="0">
                 <a:cs typeface="Calibri" panose="020F0502020204030204"/>
               </a:rPr>
               <a:t>404 – Not found</a:t>
@@ -5294,7 +5294,7 @@
               <a:buChar char="•"/>
             </a:pPr>
             <a:r>
-              <a:rPr lang="en-GB">
+              <a:rPr lang="en-GB" dirty="0">
                 <a:cs typeface="Calibri" panose="020F0502020204030204"/>
               </a:rPr>
               <a:t>500 – Internal server error</a:t>
@@ -5306,10 +5306,10 @@
               <a:buChar char="•"/>
             </a:pPr>
             <a:r>
-              <a:rPr lang="en-GB">
+              <a:rPr lang="en-GB" dirty="0">
                 <a:cs typeface="Calibri" panose="020F0502020204030204"/>
               </a:rPr>
-              <a:t>Content is usually JSON or XML</a:t>
+              <a:t>Content is usually JSON or XML. Sometimes in binary format.</a:t>
             </a:r>
           </a:p>
         </p:txBody>
@@ -5933,6 +5933,22 @@
               </a:rPr>
               <a:t>https://github.com/OllyButters/HDS-plumber/archive/refs/heads/main.zip</a:t>
             </a:r>
+            <a:endParaRPr lang="en-GB" dirty="0">
+              <a:ea typeface="+mn-lt"/>
+              <a:cs typeface="+mn-lt"/>
+            </a:endParaRPr>
+          </a:p>
+          <a:p>
+            <a:pPr marL="514350" indent="-514350">
+              <a:buAutoNum type="arabicPeriod"/>
+            </a:pPr>
+            <a:r>
+              <a:rPr lang="en-GB" dirty="0">
+                <a:ea typeface="+mn-lt"/>
+                <a:cs typeface="+mn-lt"/>
+              </a:rPr>
+              <a:t>Extract the zip file.</a:t>
+            </a:r>
             <a:endParaRPr lang="en-US" dirty="0"/>
           </a:p>
           <a:p>
@@ -5969,19 +5985,7 @@
               <a:rPr lang="en-GB" dirty="0">
                 <a:cs typeface="Calibri"/>
               </a:rPr>
-              <a:t>Run the R file one line at a time (Ctrl-Enter) and read the comments as </a:t>
-            </a:r>
-            <a:r>
-              <a:rPr lang="en-GB">
-                <a:cs typeface="Calibri"/>
-              </a:rPr>
-              <a:t>you go</a:t>
-            </a:r>
-            <a:r>
-              <a:rPr lang="en-GB" dirty="0">
-                <a:cs typeface="Calibri"/>
-              </a:rPr>
-              <a:t>.</a:t>
+              <a:t>Run the R file one line at a time (Ctrl-Enter) and read the comments as you go.</a:t>
             </a:r>
             <a:endParaRPr lang="en-GB" dirty="0">
               <a:ea typeface="Calibri"/>
@@ -5992,7 +5996,7 @@
             <a:pPr marL="514350" indent="-514350">
               <a:buAutoNum type="arabicPeriod"/>
             </a:pPr>
-            <a:endParaRPr lang="en-GB">
+            <a:endParaRPr lang="en-GB" dirty="0">
               <a:cs typeface="Calibri"/>
             </a:endParaRPr>
           </a:p>
@@ -10505,12 +10509,12 @@
           <a:lstStyle/>
           <a:p>
             <a:r>
-              <a:rPr lang="en-GB">
+              <a:rPr lang="en-GB" dirty="0">
                 <a:cs typeface="Calibri"/>
               </a:rPr>
               <a:t>What is an API?</a:t>
             </a:r>
-            <a:endParaRPr lang="en-GB"/>
+            <a:endParaRPr lang="en-GB" dirty="0"/>
           </a:p>
         </p:txBody>
       </p:sp>
@@ -10542,7 +10546,7 @@
               <a:buChar char="•"/>
             </a:pPr>
             <a:r>
-              <a:rPr lang="en-GB">
+              <a:rPr lang="en-GB" dirty="0">
                 <a:cs typeface="Calibri" panose="020F0502020204030204"/>
               </a:rPr>
               <a:t>Application Programming Interface.</a:t>
@@ -10607,36 +10611,6 @@
           </a:p>
         </p:txBody>
       </p:sp>
-      <p:pic>
-        <p:nvPicPr>
-          <p:cNvPr id="8" name="Picture 8" descr="Diagram&#10;&#10;Description automatically generated">
-            <a:extLst>
-              <a:ext uri="{FF2B5EF4-FFF2-40B4-BE49-F238E27FC236}">
-                <a16:creationId xmlns:a16="http://schemas.microsoft.com/office/drawing/2014/main" id="{B365D839-1CD6-48B7-8797-C92A045EA337}"/>
-              </a:ext>
-            </a:extLst>
-          </p:cNvPr>
-          <p:cNvPicPr>
-            <a:picLocks noChangeAspect="1"/>
-          </p:cNvPicPr>
-          <p:nvPr/>
-        </p:nvPicPr>
-        <p:blipFill>
-          <a:blip r:embed="rId2"/>
-          <a:stretch>
-            <a:fillRect/>
-          </a:stretch>
-        </p:blipFill>
-        <p:spPr>
-          <a:xfrm>
-            <a:off x="2594069" y="2359234"/>
-            <a:ext cx="5895109" cy="3625911"/>
-          </a:xfrm>
-          <a:prstGeom prst="rect">
-            <a:avLst/>
-          </a:prstGeom>
-        </p:spPr>
-      </p:pic>
       <p:sp>
         <p:nvSpPr>
           <p:cNvPr id="9" name="TextBox 8">
@@ -10670,7 +10644,7 @@
           <a:p>
             <a:pPr algn="l"/>
             <a:r>
-              <a:rPr lang="en-GB">
+              <a:rPr lang="en-GB" dirty="0">
                 <a:solidFill>
                   <a:schemeClr val="bg2">
                     <a:lumMod val="75000"/>
@@ -10679,9 +10653,9 @@
                 <a:ea typeface="+mn-lt"/>
                 <a:cs typeface="+mn-lt"/>
               </a:rPr>
-              <a:t>https://www.planningpme.com/planningpme-api.htm</a:t>
-            </a:r>
-            <a:endParaRPr lang="en-US">
+              <a:t>https://www.postman.com</a:t>
+            </a:r>
+            <a:endParaRPr lang="en-US" dirty="0">
               <a:solidFill>
                 <a:schemeClr val="bg2">
                   <a:lumMod val="75000"/>
@@ -10692,6 +10666,42 @@
           </a:p>
         </p:txBody>
       </p:sp>
+      <p:pic>
+        <p:nvPicPr>
+          <p:cNvPr id="7" name="Graphic 6">
+            <a:extLst>
+              <a:ext uri="{FF2B5EF4-FFF2-40B4-BE49-F238E27FC236}">
+                <a16:creationId xmlns:a16="http://schemas.microsoft.com/office/drawing/2014/main" id="{B331091A-84C8-FC51-3116-906B748EBC3A}"/>
+              </a:ext>
+            </a:extLst>
+          </p:cNvPr>
+          <p:cNvPicPr>
+            <a:picLocks noChangeAspect="1"/>
+          </p:cNvPicPr>
+          <p:nvPr/>
+        </p:nvPicPr>
+        <p:blipFill>
+          <a:blip r:embed="rId2">
+            <a:extLst>
+              <a:ext uri="{96DAC541-7B7A-43D3-8B79-37D633B846F1}">
+                <asvg:svgBlip xmlns:asvg="http://schemas.microsoft.com/office/drawing/2016/SVG/main" r:embed="rId3"/>
+              </a:ext>
+            </a:extLst>
+          </a:blip>
+          <a:stretch>
+            <a:fillRect/>
+          </a:stretch>
+        </p:blipFill>
+        <p:spPr>
+          <a:xfrm>
+            <a:off x="2942311" y="2373921"/>
+            <a:ext cx="5981700" cy="3676650"/>
+          </a:xfrm>
+          <a:prstGeom prst="rect">
+            <a:avLst/>
+          </a:prstGeom>
+        </p:spPr>
+      </p:pic>
     </p:spTree>
     <p:extLst>
       <p:ext uri="{BB962C8B-B14F-4D97-AF65-F5344CB8AC3E}">
@@ -12723,7 +12733,7 @@
           <a:lstStyle/>
           <a:p>
             <a:r>
-              <a:rPr lang="en-GB" sz="2800" u="sng">
+              <a:rPr lang="en-GB" sz="2800" u="sng" dirty="0">
                 <a:cs typeface="Calibri" panose="020F0502020204030204"/>
               </a:rPr>
               <a:t>Add data</a:t>
@@ -12735,10 +12745,10 @@
               <a:buChar char="•"/>
             </a:pPr>
             <a:r>
-              <a:rPr lang="en-GB" sz="2800"/>
-              <a:t>Twitter</a:t>
-            </a:r>
-            <a:endParaRPr lang="en-US" sz="2800">
+              <a:rPr lang="en-GB" sz="2800" dirty="0"/>
+              <a:t>X (Twitter)</a:t>
+            </a:r>
+            <a:endParaRPr lang="en-US" sz="2800" dirty="0">
               <a:cs typeface="Calibri"/>
             </a:endParaRPr>
           </a:p>
@@ -12748,7 +12758,7 @@
               <a:buChar char="•"/>
             </a:pPr>
             <a:r>
-              <a:rPr lang="en-GB" sz="2800">
+              <a:rPr lang="en-GB" sz="2800" dirty="0">
                 <a:cs typeface="Calibri"/>
               </a:rPr>
               <a:t>Facebook</a:t>
@@ -12760,14 +12770,14 @@
               <a:buChar char="•"/>
             </a:pPr>
             <a:r>
-              <a:rPr lang="en-GB" sz="2800">
+              <a:rPr lang="en-GB" sz="2800" dirty="0">
                 <a:cs typeface="Calibri"/>
               </a:rPr>
               <a:t>Instagram</a:t>
             </a:r>
           </a:p>
           <a:p>
-            <a:endParaRPr lang="en-GB">
+            <a:endParaRPr lang="en-GB" dirty="0">
               <a:cs typeface="Calibri"/>
             </a:endParaRPr>
           </a:p>
@@ -12948,7 +12958,7 @@
           <a:lstStyle/>
           <a:p>
             <a:r>
-              <a:rPr lang="en-GB" sz="2800" u="sng">
+              <a:rPr lang="en-GB" sz="2800" u="sng" dirty="0">
                 <a:cs typeface="Calibri"/>
               </a:rPr>
               <a:t>Real world interaction</a:t>
@@ -12960,7 +12970,7 @@
               <a:buChar char="•"/>
             </a:pPr>
             <a:r>
-              <a:rPr lang="en-GB" sz="2800">
+              <a:rPr lang="en-GB" sz="2800" dirty="0">
                 <a:cs typeface="Calibri"/>
               </a:rPr>
               <a:t>Google Nest</a:t>
@@ -12972,7 +12982,7 @@
               <a:buChar char="•"/>
             </a:pPr>
             <a:r>
-              <a:rPr lang="en-GB" sz="2800">
+              <a:rPr lang="en-GB" sz="2800" dirty="0">
                 <a:cs typeface="Calibri"/>
               </a:rPr>
               <a:t>Dishwasher</a:t>
@@ -12984,7 +12994,7 @@
               <a:buChar char="•"/>
             </a:pPr>
             <a:r>
-              <a:rPr lang="en-GB" sz="2800">
+              <a:rPr lang="en-GB" sz="2800" dirty="0">
                 <a:cs typeface="Calibri"/>
               </a:rPr>
               <a:t>Burglar alarm</a:t>
